--- a/vignettes/figures/decision_tree_simplified.pptx
+++ b/vignettes/figures/decision_tree_simplified.pptx
@@ -5,10 +5,11 @@
     <p:sldMasterId id="2147483648" r:id="rId1"/>
   </p:sldMasterIdLst>
   <p:notesMasterIdLst>
-    <p:notesMasterId r:id="rId3"/>
+    <p:notesMasterId r:id="rId4"/>
   </p:notesMasterIdLst>
   <p:sldIdLst>
     <p:sldId id="266" r:id="rId2"/>
+    <p:sldId id="267" r:id="rId3"/>
   </p:sldIdLst>
   <p:sldSz cx="12192000" cy="6858000"/>
   <p:notesSz cx="6858000" cy="9144000"/>
@@ -129,7 +130,7 @@
 <file path=ppt/revisionInfo.xml><?xml version="1.0" encoding="utf-8"?>
 <p1510:revInfo xmlns:a="http://schemas.openxmlformats.org/drawingml/2006/main" xmlns:r="http://schemas.openxmlformats.org/officeDocument/2006/relationships" xmlns:p1510="http://schemas.microsoft.com/office/powerpoint/2015/10/main">
   <p1510:revLst>
-    <p1510:client id="{8AF86D12-6723-CC4E-A0E1-2BC3243ABD01}" v="7" dt="2025-12-27T16:52:27.514"/>
+    <p1510:client id="{8AF86D12-6723-CC4E-A0E1-2BC3243ABD01}" v="12" dt="2025-12-27T17:44:40.291"/>
   </p1510:revLst>
 </p1510:revInfo>
 </file>
@@ -582,6 +583,114 @@
     <p:extLst>
       <p:ext uri="{BB962C8B-B14F-4D97-AF65-F5344CB8AC3E}">
         <p14:creationId xmlns:p14="http://schemas.microsoft.com/office/powerpoint/2010/main" val="2344398188"/>
+      </p:ext>
+    </p:extLst>
+  </p:cSld>
+  <p:clrMapOvr>
+    <a:masterClrMapping/>
+  </p:clrMapOvr>
+</p:notes>
+</file>
+
+<file path=ppt/notesSlides/notesSlide2.xml><?xml version="1.0" encoding="utf-8"?>
+<p:notes xmlns:a="http://schemas.openxmlformats.org/drawingml/2006/main" xmlns:r="http://schemas.openxmlformats.org/officeDocument/2006/relationships" xmlns:p="http://schemas.openxmlformats.org/presentationml/2006/main">
+  <p:cSld>
+    <p:spTree>
+      <p:nvGrpSpPr>
+        <p:cNvPr id="1" name="">
+          <a:extLst>
+            <a:ext uri="{FF2B5EF4-FFF2-40B4-BE49-F238E27FC236}">
+              <a16:creationId xmlns:a16="http://schemas.microsoft.com/office/drawing/2014/main" id="{DD16926B-49C4-591F-2611-4501B97913E5}"/>
+            </a:ext>
+          </a:extLst>
+        </p:cNvPr>
+        <p:cNvGrpSpPr/>
+        <p:nvPr/>
+      </p:nvGrpSpPr>
+      <p:grpSpPr>
+        <a:xfrm>
+          <a:off x="0" y="0"/>
+          <a:ext cx="0" cy="0"/>
+          <a:chOff x="0" y="0"/>
+          <a:chExt cx="0" cy="0"/>
+        </a:xfrm>
+      </p:grpSpPr>
+      <p:sp>
+        <p:nvSpPr>
+          <p:cNvPr id="2" name="Folienbildplatzhalter 1">
+            <a:extLst>
+              <a:ext uri="{FF2B5EF4-FFF2-40B4-BE49-F238E27FC236}">
+                <a16:creationId xmlns:a16="http://schemas.microsoft.com/office/drawing/2014/main" id="{6B5B5891-1E36-AE13-C7CE-F88F374A4251}"/>
+              </a:ext>
+            </a:extLst>
+          </p:cNvPr>
+          <p:cNvSpPr>
+            <a:spLocks noGrp="1" noRot="1" noChangeAspect="1"/>
+          </p:cNvSpPr>
+          <p:nvPr>
+            <p:ph type="sldImg"/>
+          </p:nvPr>
+        </p:nvSpPr>
+        <p:spPr/>
+      </p:sp>
+      <p:sp>
+        <p:nvSpPr>
+          <p:cNvPr id="3" name="Notizenplatzhalter 2">
+            <a:extLst>
+              <a:ext uri="{FF2B5EF4-FFF2-40B4-BE49-F238E27FC236}">
+                <a16:creationId xmlns:a16="http://schemas.microsoft.com/office/drawing/2014/main" id="{D7F07724-D67C-B8CA-5396-E16791643B37}"/>
+              </a:ext>
+            </a:extLst>
+          </p:cNvPr>
+          <p:cNvSpPr>
+            <a:spLocks noGrp="1"/>
+          </p:cNvSpPr>
+          <p:nvPr>
+            <p:ph type="body" idx="1"/>
+          </p:nvPr>
+        </p:nvSpPr>
+        <p:spPr/>
+        <p:txBody>
+          <a:bodyPr/>
+          <a:lstStyle/>
+          <a:p>
+            <a:endParaRPr lang="de-DE" dirty="0"/>
+          </a:p>
+        </p:txBody>
+      </p:sp>
+      <p:sp>
+        <p:nvSpPr>
+          <p:cNvPr id="4" name="Foliennummernplatzhalter 3">
+            <a:extLst>
+              <a:ext uri="{FF2B5EF4-FFF2-40B4-BE49-F238E27FC236}">
+                <a16:creationId xmlns:a16="http://schemas.microsoft.com/office/drawing/2014/main" id="{0CFF747C-1734-1852-51EC-D016FC409046}"/>
+              </a:ext>
+            </a:extLst>
+          </p:cNvPr>
+          <p:cNvSpPr>
+            <a:spLocks noGrp="1"/>
+          </p:cNvSpPr>
+          <p:nvPr>
+            <p:ph type="sldNum" sz="quarter" idx="5"/>
+          </p:nvPr>
+        </p:nvSpPr>
+        <p:spPr/>
+        <p:txBody>
+          <a:bodyPr/>
+          <a:lstStyle/>
+          <a:p>
+            <a:fld id="{67B21A6D-3249-074E-BBD6-BCFA95367850}" type="slidenum">
+              <a:rPr lang="de-DE" smtClean="0"/>
+              <a:t>2</a:t>
+            </a:fld>
+            <a:endParaRPr lang="de-DE"/>
+          </a:p>
+        </p:txBody>
+      </p:sp>
+    </p:spTree>
+    <p:extLst>
+      <p:ext uri="{BB962C8B-B14F-4D97-AF65-F5344CB8AC3E}">
+        <p14:creationId xmlns:p14="http://schemas.microsoft.com/office/powerpoint/2010/main" val="3067432286"/>
       </p:ext>
     </p:extLst>
   </p:cSld>
@@ -5688,7 +5797,21 @@
                         <a:latin typeface="Cambria Math" panose="02040503050406030204" pitchFamily="18" charset="0"/>
                         <a:ea typeface="Cambria Math" panose="02040503050406030204" pitchFamily="18" charset="0"/>
                       </a:rPr>
-                      <m:t>≤30</m:t>
+                      <m:t>≤</m:t>
+                    </m:r>
+                    <m:r>
+                      <a:rPr lang="en-US" sz="1200" b="0" i="1" noProof="0" smtClean="0">
+                        <a:latin typeface="Cambria Math" panose="02040503050406030204" pitchFamily="18" charset="0"/>
+                        <a:ea typeface="Cambria Math" panose="02040503050406030204" pitchFamily="18" charset="0"/>
+                      </a:rPr>
+                      <m:t>5</m:t>
+                    </m:r>
+                    <m:r>
+                      <a:rPr lang="en-GB" sz="1200" i="1" noProof="0" smtClean="0">
+                        <a:latin typeface="Cambria Math" panose="02040503050406030204" pitchFamily="18" charset="0"/>
+                        <a:ea typeface="Cambria Math" panose="02040503050406030204" pitchFamily="18" charset="0"/>
+                      </a:rPr>
+                      <m:t>0</m:t>
                     </m:r>
                     <m:r>
                       <a:rPr lang="en-GB" sz="1200" i="1" noProof="0" smtClean="0">
@@ -6534,11 +6657,18 @@
                       <m:t>&gt;</m:t>
                     </m:r>
                     <m:r>
+                      <a:rPr lang="en-US" sz="1200" b="0" i="1" smtClean="0">
+                        <a:latin typeface="Cambria Math" panose="02040503050406030204" pitchFamily="18" charset="0"/>
+                        <a:ea typeface="Cambria Math" panose="02040503050406030204" pitchFamily="18" charset="0"/>
+                      </a:rPr>
+                      <m:t>5</m:t>
+                    </m:r>
+                    <m:r>
                       <a:rPr lang="en-GB" sz="1200" i="1" noProof="0" smtClean="0">
                         <a:latin typeface="Cambria Math" panose="02040503050406030204" pitchFamily="18" charset="0"/>
                         <a:ea typeface="Cambria Math" panose="02040503050406030204" pitchFamily="18" charset="0"/>
                       </a:rPr>
-                      <m:t>30</m:t>
+                      <m:t>0</m:t>
                     </m:r>
                     <m:r>
                       <a:rPr lang="en-GB" sz="1200" i="1" noProof="0" smtClean="0">
@@ -7192,6 +7322,1601 @@
     <p:extLst>
       <p:ext uri="{BB962C8B-B14F-4D97-AF65-F5344CB8AC3E}">
         <p14:creationId xmlns:p14="http://schemas.microsoft.com/office/powerpoint/2010/main" val="741613057"/>
+      </p:ext>
+    </p:extLst>
+  </p:cSld>
+  <p:clrMapOvr>
+    <a:masterClrMapping/>
+  </p:clrMapOvr>
+</p:sld>
+</file>
+
+<file path=ppt/slides/slide2.xml><?xml version="1.0" encoding="utf-8"?>
+<p:sld xmlns:a="http://schemas.openxmlformats.org/drawingml/2006/main" xmlns:r="http://schemas.openxmlformats.org/officeDocument/2006/relationships" xmlns:p="http://schemas.openxmlformats.org/presentationml/2006/main">
+  <p:cSld>
+    <p:spTree>
+      <p:nvGrpSpPr>
+        <p:cNvPr id="1" name="">
+          <a:extLst>
+            <a:ext uri="{FF2B5EF4-FFF2-40B4-BE49-F238E27FC236}">
+              <a16:creationId xmlns:a16="http://schemas.microsoft.com/office/drawing/2014/main" id="{8C739AFC-CD70-982A-DBDA-865556367CE5}"/>
+            </a:ext>
+          </a:extLst>
+        </p:cNvPr>
+        <p:cNvGrpSpPr/>
+        <p:nvPr/>
+      </p:nvGrpSpPr>
+      <p:grpSpPr>
+        <a:xfrm>
+          <a:off x="0" y="0"/>
+          <a:ext cx="0" cy="0"/>
+          <a:chOff x="0" y="0"/>
+          <a:chExt cx="0" cy="0"/>
+        </a:xfrm>
+      </p:grpSpPr>
+      <p:sp>
+        <p:nvSpPr>
+          <p:cNvPr id="160" name="Textfeld 159">
+            <a:extLst>
+              <a:ext uri="{FF2B5EF4-FFF2-40B4-BE49-F238E27FC236}">
+                <a16:creationId xmlns:a16="http://schemas.microsoft.com/office/drawing/2014/main" id="{32343269-6602-BE89-6A69-CE14BE9C1B88}"/>
+              </a:ext>
+            </a:extLst>
+          </p:cNvPr>
+          <p:cNvSpPr txBox="1"/>
+          <p:nvPr/>
+        </p:nvSpPr>
+        <p:spPr>
+          <a:xfrm>
+            <a:off x="10466741" y="1690687"/>
+            <a:ext cx="1618428" cy="276999"/>
+          </a:xfrm>
+          <a:prstGeom prst="rect">
+            <a:avLst/>
+          </a:prstGeom>
+          <a:solidFill>
+            <a:schemeClr val="accent2">
+              <a:lumMod val="20000"/>
+              <a:lumOff val="80000"/>
+            </a:schemeClr>
+          </a:solidFill>
+          <a:ln w="12700">
+            <a:noFill/>
+          </a:ln>
+        </p:spPr>
+        <p:txBody>
+          <a:bodyPr wrap="square">
+            <a:spAutoFit/>
+          </a:bodyPr>
+          <a:lstStyle>
+            <a:defPPr>
+              <a:defRPr lang="de-DE"/>
+            </a:defPPr>
+            <a:lvl1pPr algn="ctr">
+              <a:defRPr sz="1200"/>
+            </a:lvl1pPr>
+          </a:lstStyle>
+          <a:p>
+            <a:r>
+              <a:rPr lang="en-GB" noProof="0" dirty="0">
+                <a:latin typeface="Calibri" panose="020F0502020204030204" pitchFamily="34" charset="0"/>
+                <a:ea typeface="Cambria Math" panose="02040503050406030204" pitchFamily="18" charset="0"/>
+                <a:cs typeface="Calibri" panose="020F0502020204030204" pitchFamily="34" charset="0"/>
+              </a:rPr>
+              <a:t>Check </a:t>
+            </a:r>
+            <a:r>
+              <a:rPr lang="en-GB" dirty="0">
+                <a:latin typeface="Calibri" panose="020F0502020204030204" pitchFamily="34" charset="0"/>
+                <a:ea typeface="Cambria Math" panose="02040503050406030204" pitchFamily="18" charset="0"/>
+                <a:cs typeface="Calibri" panose="020F0502020204030204" pitchFamily="34" charset="0"/>
+              </a:rPr>
+              <a:t>normality</a:t>
+            </a:r>
+            <a:endParaRPr lang="en-GB" noProof="0" dirty="0">
+              <a:latin typeface="Calibri" panose="020F0502020204030204" pitchFamily="34" charset="0"/>
+              <a:ea typeface="Cambria Math" panose="02040503050406030204" pitchFamily="18" charset="0"/>
+              <a:cs typeface="Calibri" panose="020F0502020204030204" pitchFamily="34" charset="0"/>
+            </a:endParaRPr>
+          </a:p>
+        </p:txBody>
+      </p:sp>
+      <mc:AlternateContent xmlns:mc="http://schemas.openxmlformats.org/markup-compatibility/2006">
+        <mc:Choice xmlns:a14="http://schemas.microsoft.com/office/drawing/2010/main" Requires="a14">
+          <p:sp>
+            <p:nvSpPr>
+              <p:cNvPr id="7" name="Textfeld 6">
+                <a:extLst>
+                  <a:ext uri="{FF2B5EF4-FFF2-40B4-BE49-F238E27FC236}">
+                    <a16:creationId xmlns:a16="http://schemas.microsoft.com/office/drawing/2014/main" id="{6EBDA44C-73DC-3A1A-11CB-133C08445E81}"/>
+                  </a:ext>
+                </a:extLst>
+              </p:cNvPr>
+              <p:cNvSpPr txBox="1"/>
+              <p:nvPr/>
+            </p:nvSpPr>
+            <p:spPr>
+              <a:xfrm>
+                <a:off x="2943726" y="268315"/>
+                <a:ext cx="6737685" cy="461665"/>
+              </a:xfrm>
+              <a:prstGeom prst="rect">
+                <a:avLst/>
+              </a:prstGeom>
+              <a:noFill/>
+              <a:ln w="6350">
+                <a:solidFill>
+                  <a:schemeClr val="bg2">
+                    <a:lumMod val="75000"/>
+                  </a:schemeClr>
+                </a:solidFill>
+              </a:ln>
+            </p:spPr>
+            <p:txBody>
+              <a:bodyPr wrap="square">
+                <a:spAutoFit/>
+              </a:bodyPr>
+              <a:lstStyle/>
+              <a:p>
+                <a:pPr marL="171450" indent="-171450">
+                  <a:buFont typeface="Arial" panose="020B0604020202020204" pitchFamily="34" charset="0"/>
+                  <a:buChar char="•"/>
+                </a:pPr>
+                <a:r>
+                  <a:rPr lang="en-GB" sz="1200" dirty="0">
+                    <a:latin typeface="Calibri" panose="020F0502020204030204" pitchFamily="34" charset="0"/>
+                    <a:ea typeface="Cambria Math" panose="02040503050406030204" pitchFamily="18" charset="0"/>
+                    <a:cs typeface="Calibri" panose="020F0502020204030204" pitchFamily="34" charset="0"/>
+                  </a:rPr>
+                  <a:t>C</a:t>
+                </a:r>
+                <a:r>
+                  <a:rPr lang="en-GB" sz="1200" noProof="0" dirty="0" err="1">
+                    <a:latin typeface="Calibri" panose="020F0502020204030204" pitchFamily="34" charset="0"/>
+                    <a:ea typeface="Cambria Math" panose="02040503050406030204" pitchFamily="18" charset="0"/>
+                    <a:cs typeface="Calibri" panose="020F0502020204030204" pitchFamily="34" charset="0"/>
+                  </a:rPr>
+                  <a:t>ategorical</a:t>
+                </a:r>
+                <a:r>
+                  <a:rPr lang="en-GB" sz="1200" noProof="0" dirty="0">
+                    <a:latin typeface="Calibri" panose="020F0502020204030204" pitchFamily="34" charset="0"/>
+                    <a:ea typeface="Cambria Math" panose="02040503050406030204" pitchFamily="18" charset="0"/>
+                    <a:cs typeface="Calibri" panose="020F0502020204030204" pitchFamily="34" charset="0"/>
+                  </a:rPr>
+                  <a:t> predictor of </a:t>
+                </a:r>
+                <a:r>
+                  <a:rPr lang="en-GB" sz="1200" noProof="0" dirty="0">
+                    <a:latin typeface="Courier New" panose="02070309020205020404" pitchFamily="49" charset="0"/>
+                    <a:ea typeface="Cambria Math" panose="02040503050406030204" pitchFamily="18" charset="0"/>
+                    <a:cs typeface="Courier New" panose="02070309020205020404" pitchFamily="49" charset="0"/>
+                  </a:rPr>
+                  <a:t>class </a:t>
+                </a:r>
+                <a:r>
+                  <a:rPr lang="en-GB" sz="1200" dirty="0">
+                    <a:latin typeface="Calibri" panose="020F0502020204030204" pitchFamily="34" charset="0"/>
+                    <a:ea typeface="Cambria Math" panose="02040503050406030204" pitchFamily="18" charset="0"/>
+                    <a:cs typeface="Calibri" panose="020F0502020204030204" pitchFamily="34" charset="0"/>
+                  </a:rPr>
+                  <a:t>“</a:t>
+                </a:r>
+                <a:r>
+                  <a:rPr lang="en-GB" sz="1200" dirty="0">
+                    <a:latin typeface="Courier New" panose="02070309020205020404" pitchFamily="49" charset="0"/>
+                    <a:ea typeface="Cambria Math" panose="02040503050406030204" pitchFamily="18" charset="0"/>
+                    <a:cs typeface="Courier New" panose="02070309020205020404" pitchFamily="49" charset="0"/>
+                  </a:rPr>
+                  <a:t>factor</a:t>
+                </a:r>
+                <a:r>
+                  <a:rPr lang="en-GB" sz="1200" noProof="0" dirty="0">
+                    <a:latin typeface="Calibri" panose="020F0502020204030204" pitchFamily="34" charset="0"/>
+                    <a:ea typeface="Cambria Math" panose="02040503050406030204" pitchFamily="18" charset="0"/>
+                    <a:cs typeface="Calibri" panose="020F0502020204030204" pitchFamily="34" charset="0"/>
+                  </a:rPr>
+                  <a:t>“  with </a:t>
+                </a:r>
+                <a14:m>
+                  <m:oMath xmlns:m="http://schemas.openxmlformats.org/officeDocument/2006/math">
+                    <m:r>
+                      <a:rPr lang="en-GB" sz="1200" i="1" noProof="0" smtClean="0">
+                        <a:latin typeface="Cambria Math" panose="02040503050406030204" pitchFamily="18" charset="0"/>
+                        <a:ea typeface="Cambria Math" panose="02040503050406030204" pitchFamily="18" charset="0"/>
+                      </a:rPr>
+                      <m:t>𝑁</m:t>
+                    </m:r>
+                  </m:oMath>
+                </a14:m>
+                <a:r>
+                  <a:rPr lang="en-GB" sz="1200" noProof="0" dirty="0">
+                    <a:latin typeface="Calibri" panose="020F0502020204030204" pitchFamily="34" charset="0"/>
+                    <a:ea typeface="Cambria Math" panose="02040503050406030204" pitchFamily="18" charset="0"/>
+                    <a:cs typeface="Calibri" panose="020F0502020204030204" pitchFamily="34" charset="0"/>
+                  </a:rPr>
+                  <a:t> levels </a:t>
+                </a:r>
+                <a:r>
+                  <a:rPr lang="en-GB" sz="1200" dirty="0">
+                    <a:latin typeface="Calibri" panose="020F0502020204030204" pitchFamily="34" charset="0"/>
+                    <a:ea typeface="Cambria Math" panose="02040503050406030204" pitchFamily="18" charset="0"/>
+                    <a:cs typeface="Calibri" panose="020F0502020204030204" pitchFamily="34" charset="0"/>
+                  </a:rPr>
+                  <a:t>with </a:t>
+                </a:r>
+                <a14:m>
+                  <m:oMath xmlns:m="http://schemas.openxmlformats.org/officeDocument/2006/math">
+                    <m:sSub>
+                      <m:sSubPr>
+                        <m:ctrlPr>
+                          <a:rPr lang="en-GB" sz="1200" i="1" dirty="0">
+                            <a:latin typeface="Cambria Math" panose="02040503050406030204" pitchFamily="18" charset="0"/>
+                            <a:ea typeface="Cambria Math" panose="02040503050406030204" pitchFamily="18" charset="0"/>
+                            <a:cs typeface="Calibri" panose="020F0502020204030204" pitchFamily="34" charset="0"/>
+                          </a:rPr>
+                        </m:ctrlPr>
+                      </m:sSubPr>
+                      <m:e>
+                        <m:r>
+                          <a:rPr lang="en-GB" sz="1200" i="1" dirty="0">
+                            <a:latin typeface="Cambria Math" panose="02040503050406030204" pitchFamily="18" charset="0"/>
+                            <a:ea typeface="Cambria Math" panose="02040503050406030204" pitchFamily="18" charset="0"/>
+                            <a:cs typeface="Calibri" panose="020F0502020204030204" pitchFamily="34" charset="0"/>
+                          </a:rPr>
+                          <m:t>𝑛</m:t>
+                        </m:r>
+                      </m:e>
+                      <m:sub>
+                        <m:r>
+                          <a:rPr lang="en-GB" sz="1200" i="1" dirty="0">
+                            <a:latin typeface="Cambria Math" panose="02040503050406030204" pitchFamily="18" charset="0"/>
+                            <a:ea typeface="Cambria Math" panose="02040503050406030204" pitchFamily="18" charset="0"/>
+                            <a:cs typeface="Calibri" panose="020F0502020204030204" pitchFamily="34" charset="0"/>
+                          </a:rPr>
+                          <m:t>𝑖</m:t>
+                        </m:r>
+                      </m:sub>
+                    </m:sSub>
+                  </m:oMath>
+                </a14:m>
+                <a:r>
+                  <a:rPr lang="en-GB" sz="1200" dirty="0">
+                    <a:latin typeface="Calibri" panose="020F0502020204030204" pitchFamily="34" charset="0"/>
+                    <a:ea typeface="Cambria Math" panose="02040503050406030204" pitchFamily="18" charset="0"/>
+                    <a:cs typeface="Calibri" panose="020F0502020204030204" pitchFamily="34" charset="0"/>
+                  </a:rPr>
+                  <a:t> entries in each level </a:t>
+                </a:r>
+                <a14:m>
+                  <m:oMath xmlns:m="http://schemas.openxmlformats.org/officeDocument/2006/math">
+                    <m:r>
+                      <a:rPr lang="en-GB" sz="1200" i="1" dirty="0">
+                        <a:latin typeface="Cambria Math" panose="02040503050406030204" pitchFamily="18" charset="0"/>
+                        <a:ea typeface="Cambria Math" panose="02040503050406030204" pitchFamily="18" charset="0"/>
+                        <a:cs typeface="Calibri" panose="020F0502020204030204" pitchFamily="34" charset="0"/>
+                      </a:rPr>
+                      <m:t>, </m:t>
+                    </m:r>
+                    <m:r>
+                      <a:rPr lang="en-GB" sz="1200" i="1" dirty="0" err="1">
+                        <a:latin typeface="Cambria Math" panose="02040503050406030204" pitchFamily="18" charset="0"/>
+                        <a:ea typeface="Cambria Math" panose="02040503050406030204" pitchFamily="18" charset="0"/>
+                        <a:cs typeface="Calibri" panose="020F0502020204030204" pitchFamily="34" charset="0"/>
+                      </a:rPr>
+                      <m:t>𝑖</m:t>
+                    </m:r>
+                    <m:r>
+                      <a:rPr lang="en-GB" sz="1200" i="1" dirty="0">
+                        <a:latin typeface="Cambria Math" panose="02040503050406030204" pitchFamily="18" charset="0"/>
+                        <a:ea typeface="Cambria Math" panose="02040503050406030204" pitchFamily="18" charset="0"/>
+                        <a:cs typeface="Calibri" panose="020F0502020204030204" pitchFamily="34" charset="0"/>
+                      </a:rPr>
+                      <m:t>=1,2,…,</m:t>
+                    </m:r>
+                    <m:r>
+                      <a:rPr lang="en-GB" sz="1200" i="1" dirty="0">
+                        <a:latin typeface="Cambria Math" panose="02040503050406030204" pitchFamily="18" charset="0"/>
+                        <a:ea typeface="Cambria Math" panose="02040503050406030204" pitchFamily="18" charset="0"/>
+                        <a:cs typeface="Calibri" panose="020F0502020204030204" pitchFamily="34" charset="0"/>
+                      </a:rPr>
+                      <m:t>𝑁</m:t>
+                    </m:r>
+                  </m:oMath>
+                </a14:m>
+                <a:r>
+                  <a:rPr lang="en-GB" sz="1200" dirty="0">
+                    <a:latin typeface="Calibri" panose="020F0502020204030204" pitchFamily="34" charset="0"/>
+                    <a:ea typeface="Cambria Math" panose="02040503050406030204" pitchFamily="18" charset="0"/>
+                    <a:cs typeface="Calibri" panose="020F0502020204030204" pitchFamily="34" charset="0"/>
+                  </a:rPr>
+                  <a:t> </a:t>
+                </a:r>
+                <a:endParaRPr lang="en-GB" sz="1200" noProof="0" dirty="0">
+                  <a:latin typeface="Calibri" panose="020F0502020204030204" pitchFamily="34" charset="0"/>
+                  <a:ea typeface="Cambria Math" panose="02040503050406030204" pitchFamily="18" charset="0"/>
+                  <a:cs typeface="Calibri" panose="020F0502020204030204" pitchFamily="34" charset="0"/>
+                </a:endParaRPr>
+              </a:p>
+              <a:p>
+                <a:pPr marL="171450" indent="-171450">
+                  <a:buFont typeface="Arial" panose="020B0604020202020204" pitchFamily="34" charset="0"/>
+                  <a:buChar char="•"/>
+                </a:pPr>
+                <a:r>
+                  <a:rPr lang="en-GB" sz="1200" dirty="0">
+                    <a:latin typeface="Calibri" panose="020F0502020204030204" pitchFamily="34" charset="0"/>
+                    <a:ea typeface="Cambria Math" panose="02040503050406030204" pitchFamily="18" charset="0"/>
+                    <a:cs typeface="Calibri" panose="020F0502020204030204" pitchFamily="34" charset="0"/>
+                  </a:rPr>
+                  <a:t>N</a:t>
+                </a:r>
+                <a:r>
+                  <a:rPr lang="en-GB" sz="1200" noProof="0" dirty="0" err="1">
+                    <a:latin typeface="Calibri" panose="020F0502020204030204" pitchFamily="34" charset="0"/>
+                    <a:ea typeface="Cambria Math" panose="02040503050406030204" pitchFamily="18" charset="0"/>
+                    <a:cs typeface="Calibri" panose="020F0502020204030204" pitchFamily="34" charset="0"/>
+                  </a:rPr>
+                  <a:t>umeric</a:t>
+                </a:r>
+                <a:r>
+                  <a:rPr lang="en-GB" sz="1200" noProof="0" dirty="0">
+                    <a:latin typeface="Calibri" panose="020F0502020204030204" pitchFamily="34" charset="0"/>
+                    <a:ea typeface="Cambria Math" panose="02040503050406030204" pitchFamily="18" charset="0"/>
+                    <a:cs typeface="Calibri" panose="020F0502020204030204" pitchFamily="34" charset="0"/>
+                  </a:rPr>
+                  <a:t> response of </a:t>
+                </a:r>
+                <a:r>
+                  <a:rPr lang="en-GB" sz="1200" noProof="0" dirty="0">
+                    <a:latin typeface="Courier New" panose="02070309020205020404" pitchFamily="49" charset="0"/>
+                    <a:ea typeface="Cambria Math" panose="02040503050406030204" pitchFamily="18" charset="0"/>
+                    <a:cs typeface="Courier New" panose="02070309020205020404" pitchFamily="49" charset="0"/>
+                  </a:rPr>
+                  <a:t>class </a:t>
+                </a:r>
+                <a:r>
+                  <a:rPr lang="en-GB" sz="1200" dirty="0">
+                    <a:latin typeface="Calibri" panose="020F0502020204030204" pitchFamily="34" charset="0"/>
+                    <a:ea typeface="Cambria Math" panose="02040503050406030204" pitchFamily="18" charset="0"/>
+                    <a:cs typeface="Calibri" panose="020F0502020204030204" pitchFamily="34" charset="0"/>
+                  </a:rPr>
+                  <a:t>“</a:t>
+                </a:r>
+                <a:r>
+                  <a:rPr lang="en-GB" sz="1200" noProof="0" dirty="0">
+                    <a:latin typeface="Courier New" panose="02070309020205020404" pitchFamily="49" charset="0"/>
+                    <a:ea typeface="Cambria Math" panose="02040503050406030204" pitchFamily="18" charset="0"/>
+                    <a:cs typeface="Courier New" panose="02070309020205020404" pitchFamily="49" charset="0"/>
+                  </a:rPr>
+                  <a:t>numeric</a:t>
+                </a:r>
+                <a:r>
+                  <a:rPr lang="en-GB" sz="1200" dirty="0">
+                    <a:latin typeface="Calibri" panose="020F0502020204030204" pitchFamily="34" charset="0"/>
+                    <a:ea typeface="Cambria Math" panose="02040503050406030204" pitchFamily="18" charset="0"/>
+                    <a:cs typeface="Calibri" panose="020F0502020204030204" pitchFamily="34" charset="0"/>
+                  </a:rPr>
+                  <a:t>”</a:t>
+                </a:r>
+                <a:r>
+                  <a:rPr lang="en-GB" sz="1200" dirty="0">
+                    <a:latin typeface="Courier New" panose="02070309020205020404" pitchFamily="49" charset="0"/>
+                    <a:ea typeface="Cambria Math" panose="02040503050406030204" pitchFamily="18" charset="0"/>
+                    <a:cs typeface="Courier New" panose="02070309020205020404" pitchFamily="49" charset="0"/>
+                  </a:rPr>
+                  <a:t> </a:t>
+                </a:r>
+                <a:r>
+                  <a:rPr lang="en-GB" sz="1200" noProof="0" dirty="0">
+                    <a:latin typeface="Calibri" panose="020F0502020204030204" pitchFamily="34" charset="0"/>
+                    <a:ea typeface="Cambria Math" panose="02040503050406030204" pitchFamily="18" charset="0"/>
+                    <a:cs typeface="Calibri" panose="020F0502020204030204" pitchFamily="34" charset="0"/>
+                  </a:rPr>
+                  <a:t>or “</a:t>
+                </a:r>
+                <a:r>
+                  <a:rPr lang="en-GB" sz="1200" noProof="0" dirty="0">
+                    <a:latin typeface="Courier New" panose="02070309020205020404" pitchFamily="49" charset="0"/>
+                    <a:ea typeface="Cambria Math" panose="02040503050406030204" pitchFamily="18" charset="0"/>
+                    <a:cs typeface="Courier New" panose="02070309020205020404" pitchFamily="49" charset="0"/>
+                  </a:rPr>
+                  <a:t>integer</a:t>
+                </a:r>
+                <a:r>
+                  <a:rPr lang="en-GB" sz="1200" dirty="0">
+                    <a:latin typeface="Calibri" panose="020F0502020204030204" pitchFamily="34" charset="0"/>
+                    <a:ea typeface="Cambria Math" panose="02040503050406030204" pitchFamily="18" charset="0"/>
+                    <a:cs typeface="Calibri" panose="020F0502020204030204" pitchFamily="34" charset="0"/>
+                  </a:rPr>
+                  <a:t>”</a:t>
+                </a:r>
+                <a:endParaRPr lang="en-GB" sz="1200" noProof="0" dirty="0">
+                  <a:latin typeface="Calibri" panose="020F0502020204030204" pitchFamily="34" charset="0"/>
+                  <a:ea typeface="Cambria Math" panose="02040503050406030204" pitchFamily="18" charset="0"/>
+                  <a:cs typeface="Calibri" panose="020F0502020204030204" pitchFamily="34" charset="0"/>
+                </a:endParaRPr>
+              </a:p>
+            </p:txBody>
+          </p:sp>
+        </mc:Choice>
+        <mc:Fallback>
+          <p:sp>
+            <p:nvSpPr>
+              <p:cNvPr id="7" name="Textfeld 6">
+                <a:extLst>
+                  <a:ext uri="{FF2B5EF4-FFF2-40B4-BE49-F238E27FC236}">
+                    <a16:creationId xmlns:a16="http://schemas.microsoft.com/office/drawing/2014/main" id="{6EBDA44C-73DC-3A1A-11CB-133C08445E81}"/>
+                  </a:ext>
+                </a:extLst>
+              </p:cNvPr>
+              <p:cNvSpPr txBox="1">
+                <a:spLocks noRot="1" noChangeAspect="1" noMove="1" noResize="1" noEditPoints="1" noAdjustHandles="1" noChangeArrowheads="1" noChangeShapeType="1" noTextEdit="1"/>
+              </p:cNvSpPr>
+              <p:nvPr/>
+            </p:nvSpPr>
+            <p:spPr>
+              <a:xfrm>
+                <a:off x="2943726" y="268315"/>
+                <a:ext cx="6737685" cy="461665"/>
+              </a:xfrm>
+              <a:prstGeom prst="rect">
+                <a:avLst/>
+              </a:prstGeom>
+              <a:blipFill>
+                <a:blip r:embed="rId3"/>
+                <a:stretch>
+                  <a:fillRect b="-5263"/>
+                </a:stretch>
+              </a:blipFill>
+              <a:ln w="6350">
+                <a:solidFill>
+                  <a:schemeClr val="bg2">
+                    <a:lumMod val="75000"/>
+                  </a:schemeClr>
+                </a:solidFill>
+              </a:ln>
+            </p:spPr>
+            <p:txBody>
+              <a:bodyPr/>
+              <a:lstStyle/>
+              <a:p>
+                <a:r>
+                  <a:rPr lang="de-DE">
+                    <a:noFill/>
+                  </a:rPr>
+                  <a:t> </a:t>
+                </a:r>
+              </a:p>
+            </p:txBody>
+          </p:sp>
+        </mc:Fallback>
+      </mc:AlternateContent>
+      <p:sp>
+        <p:nvSpPr>
+          <p:cNvPr id="31" name="Textfeld 30">
+            <a:extLst>
+              <a:ext uri="{FF2B5EF4-FFF2-40B4-BE49-F238E27FC236}">
+                <a16:creationId xmlns:a16="http://schemas.microsoft.com/office/drawing/2014/main" id="{28FA08D1-C3AE-0652-9A48-9023D4610DD6}"/>
+              </a:ext>
+            </a:extLst>
+          </p:cNvPr>
+          <p:cNvSpPr txBox="1"/>
+          <p:nvPr/>
+        </p:nvSpPr>
+        <p:spPr>
+          <a:xfrm>
+            <a:off x="7108409" y="1507679"/>
+            <a:ext cx="2325414" cy="276999"/>
+          </a:xfrm>
+          <a:prstGeom prst="rect">
+            <a:avLst/>
+          </a:prstGeom>
+          <a:solidFill>
+            <a:schemeClr val="accent4">
+              <a:alpha val="19758"/>
+            </a:schemeClr>
+          </a:solidFill>
+          <a:ln w="12700">
+            <a:noFill/>
+          </a:ln>
+        </p:spPr>
+        <p:txBody>
+          <a:bodyPr wrap="square">
+            <a:spAutoFit/>
+          </a:bodyPr>
+          <a:lstStyle>
+            <a:defPPr>
+              <a:defRPr lang="de-DE"/>
+            </a:defPPr>
+            <a:lvl1pPr algn="ctr">
+              <a:defRPr sz="1200"/>
+            </a:lvl1pPr>
+          </a:lstStyle>
+          <a:p>
+            <a:r>
+              <a:rPr lang="en-GB" noProof="0" dirty="0" err="1">
+                <a:latin typeface="Courier New" panose="02070309020205020404" pitchFamily="49" charset="0"/>
+                <a:ea typeface="Cambria Math" panose="02040503050406030204" pitchFamily="18" charset="0"/>
+                <a:cs typeface="Courier New" panose="02070309020205020404" pitchFamily="49" charset="0"/>
+              </a:rPr>
+              <a:t>oneway.test</a:t>
+            </a:r>
+            <a:r>
+              <a:rPr lang="en-GB" noProof="0" dirty="0">
+                <a:latin typeface="Courier New" panose="02070309020205020404" pitchFamily="49" charset="0"/>
+                <a:ea typeface="Cambria Math" panose="02040503050406030204" pitchFamily="18" charset="0"/>
+                <a:cs typeface="Courier New" panose="02070309020205020404" pitchFamily="49" charset="0"/>
+              </a:rPr>
+              <a:t>()</a:t>
+            </a:r>
+          </a:p>
+        </p:txBody>
+      </p:sp>
+      <p:sp>
+        <p:nvSpPr>
+          <p:cNvPr id="93" name="Textfeld 92">
+            <a:extLst>
+              <a:ext uri="{FF2B5EF4-FFF2-40B4-BE49-F238E27FC236}">
+                <a16:creationId xmlns:a16="http://schemas.microsoft.com/office/drawing/2014/main" id="{B1B3773C-274E-336D-E030-CC35D9FB9C48}"/>
+              </a:ext>
+            </a:extLst>
+          </p:cNvPr>
+          <p:cNvSpPr txBox="1"/>
+          <p:nvPr/>
+        </p:nvSpPr>
+        <p:spPr>
+          <a:xfrm>
+            <a:off x="7075686" y="2206715"/>
+            <a:ext cx="2341206" cy="284869"/>
+          </a:xfrm>
+          <a:prstGeom prst="rect">
+            <a:avLst/>
+          </a:prstGeom>
+          <a:solidFill>
+            <a:schemeClr val="bg2">
+              <a:lumMod val="90000"/>
+            </a:schemeClr>
+          </a:solidFill>
+          <a:ln w="12700">
+            <a:solidFill>
+              <a:schemeClr val="accent1">
+                <a:lumMod val="40000"/>
+                <a:lumOff val="60000"/>
+              </a:schemeClr>
+            </a:solidFill>
+          </a:ln>
+        </p:spPr>
+        <p:txBody>
+          <a:bodyPr wrap="square">
+            <a:spAutoFit/>
+          </a:bodyPr>
+          <a:lstStyle>
+            <a:defPPr>
+              <a:defRPr lang="de-DE"/>
+            </a:defPPr>
+            <a:lvl1pPr algn="ctr">
+              <a:defRPr sz="1200"/>
+            </a:lvl1pPr>
+          </a:lstStyle>
+          <a:p>
+            <a:r>
+              <a:rPr lang="en-GB" dirty="0" err="1">
+                <a:latin typeface="Courier New" panose="02070309020205020404" pitchFamily="49" charset="0"/>
+                <a:ea typeface="Cambria Math" panose="02040503050406030204" pitchFamily="18" charset="0"/>
+                <a:cs typeface="Courier New" panose="02070309020205020404" pitchFamily="49" charset="0"/>
+              </a:rPr>
+              <a:t>games_howell</a:t>
+            </a:r>
+            <a:r>
+              <a:rPr lang="en-GB" dirty="0">
+                <a:latin typeface="Courier New" panose="02070309020205020404" pitchFamily="49" charset="0"/>
+                <a:ea typeface="Cambria Math" panose="02040503050406030204" pitchFamily="18" charset="0"/>
+                <a:cs typeface="Courier New" panose="02070309020205020404" pitchFamily="49" charset="0"/>
+              </a:rPr>
+              <a:t>()</a:t>
+            </a:r>
+            <a:endParaRPr lang="en-GB" noProof="0" dirty="0">
+              <a:latin typeface="Courier New" panose="02070309020205020404" pitchFamily="49" charset="0"/>
+              <a:ea typeface="Cambria Math" panose="02040503050406030204" pitchFamily="18" charset="0"/>
+              <a:cs typeface="Courier New" panose="02070309020205020404" pitchFamily="49" charset="0"/>
+            </a:endParaRPr>
+          </a:p>
+        </p:txBody>
+      </p:sp>
+      <p:sp>
+        <p:nvSpPr>
+          <p:cNvPr id="50" name="Textfeld 49">
+            <a:extLst>
+              <a:ext uri="{FF2B5EF4-FFF2-40B4-BE49-F238E27FC236}">
+                <a16:creationId xmlns:a16="http://schemas.microsoft.com/office/drawing/2014/main" id="{FED2405C-660B-CCC9-3EB7-23834ACB782D}"/>
+              </a:ext>
+            </a:extLst>
+          </p:cNvPr>
+          <p:cNvSpPr txBox="1"/>
+          <p:nvPr/>
+        </p:nvSpPr>
+        <p:spPr>
+          <a:xfrm>
+            <a:off x="2943726" y="1409733"/>
+            <a:ext cx="1447005" cy="276999"/>
+          </a:xfrm>
+          <a:prstGeom prst="rect">
+            <a:avLst/>
+          </a:prstGeom>
+          <a:solidFill>
+            <a:schemeClr val="accent4">
+              <a:alpha val="19758"/>
+            </a:schemeClr>
+          </a:solidFill>
+          <a:ln w="12700">
+            <a:noFill/>
+          </a:ln>
+        </p:spPr>
+        <p:txBody>
+          <a:bodyPr wrap="square">
+            <a:spAutoFit/>
+          </a:bodyPr>
+          <a:lstStyle/>
+          <a:p>
+            <a:pPr algn="ctr"/>
+            <a:r>
+              <a:rPr lang="en-GB" sz="1200" noProof="0" dirty="0" err="1">
+                <a:latin typeface="Courier New" panose="02070309020205020404" pitchFamily="49" charset="0"/>
+                <a:ea typeface="Cambria Math" panose="02040503050406030204" pitchFamily="18" charset="0"/>
+                <a:cs typeface="Courier New" panose="02070309020205020404" pitchFamily="49" charset="0"/>
+              </a:rPr>
+              <a:t>t.test</a:t>
+            </a:r>
+            <a:r>
+              <a:rPr lang="en-GB" sz="1200" noProof="0" dirty="0">
+                <a:latin typeface="Courier New" panose="02070309020205020404" pitchFamily="49" charset="0"/>
+                <a:ea typeface="Cambria Math" panose="02040503050406030204" pitchFamily="18" charset="0"/>
+                <a:cs typeface="Courier New" panose="02070309020205020404" pitchFamily="49" charset="0"/>
+              </a:rPr>
+              <a:t>()</a:t>
+            </a:r>
+          </a:p>
+        </p:txBody>
+      </p:sp>
+      <p:sp>
+        <p:nvSpPr>
+          <p:cNvPr id="4" name="Textfeld 3">
+            <a:extLst>
+              <a:ext uri="{FF2B5EF4-FFF2-40B4-BE49-F238E27FC236}">
+                <a16:creationId xmlns:a16="http://schemas.microsoft.com/office/drawing/2014/main" id="{42ACF54C-0EAA-3A67-77EC-9C898DFF873C}"/>
+              </a:ext>
+            </a:extLst>
+          </p:cNvPr>
+          <p:cNvSpPr txBox="1"/>
+          <p:nvPr/>
+        </p:nvSpPr>
+        <p:spPr>
+          <a:xfrm>
+            <a:off x="10466743" y="4273424"/>
+            <a:ext cx="1618426" cy="277200"/>
+          </a:xfrm>
+          <a:prstGeom prst="rect">
+            <a:avLst/>
+          </a:prstGeom>
+          <a:solidFill>
+            <a:schemeClr val="bg2">
+              <a:lumMod val="90000"/>
+            </a:schemeClr>
+          </a:solidFill>
+          <a:ln w="12700">
+            <a:noFill/>
+          </a:ln>
+        </p:spPr>
+        <p:txBody>
+          <a:bodyPr wrap="square">
+            <a:spAutoFit/>
+          </a:bodyPr>
+          <a:lstStyle>
+            <a:defPPr>
+              <a:defRPr lang="de-DE"/>
+            </a:defPPr>
+            <a:lvl1pPr algn="ctr">
+              <a:defRPr sz="1200"/>
+            </a:lvl1pPr>
+          </a:lstStyle>
+          <a:p>
+            <a:r>
+              <a:rPr lang="en-GB" noProof="0" dirty="0">
+                <a:latin typeface="Calibri" panose="020F0502020204030204" pitchFamily="34" charset="0"/>
+                <a:ea typeface="Cambria Math" panose="02040503050406030204" pitchFamily="18" charset="0"/>
+                <a:cs typeface="Calibri" panose="020F0502020204030204" pitchFamily="34" charset="0"/>
+              </a:rPr>
+              <a:t>Post-hoc test </a:t>
+            </a:r>
+          </a:p>
+        </p:txBody>
+      </p:sp>
+      <mc:AlternateContent xmlns:mc="http://schemas.openxmlformats.org/markup-compatibility/2006">
+        <mc:Choice xmlns:a14="http://schemas.microsoft.com/office/drawing/2010/main" Requires="a14">
+          <p:sp>
+            <p:nvSpPr>
+              <p:cNvPr id="11" name="Textfeld 10">
+                <a:extLst>
+                  <a:ext uri="{FF2B5EF4-FFF2-40B4-BE49-F238E27FC236}">
+                    <a16:creationId xmlns:a16="http://schemas.microsoft.com/office/drawing/2014/main" id="{E4BD2EA5-D25B-8C15-2733-8E2A2D1D9D5C}"/>
+                  </a:ext>
+                </a:extLst>
+              </p:cNvPr>
+              <p:cNvSpPr txBox="1"/>
+              <p:nvPr/>
+            </p:nvSpPr>
+            <p:spPr>
+              <a:xfrm>
+                <a:off x="10002785" y="5037737"/>
+                <a:ext cx="2082384" cy="461665"/>
+              </a:xfrm>
+              <a:prstGeom prst="rect">
+                <a:avLst/>
+              </a:prstGeom>
+              <a:noFill/>
+              <a:ln w="6350">
+                <a:solidFill>
+                  <a:schemeClr val="bg2">
+                    <a:lumMod val="75000"/>
+                  </a:schemeClr>
+                </a:solidFill>
+              </a:ln>
+            </p:spPr>
+            <p:txBody>
+              <a:bodyPr wrap="square">
+                <a:spAutoFit/>
+              </a:bodyPr>
+              <a:lstStyle/>
+              <a:p>
+                <a14:m>
+                  <m:oMath xmlns:m="http://schemas.openxmlformats.org/officeDocument/2006/math">
+                    <m:r>
+                      <a:rPr lang="en-GB" sz="1200" i="1" noProof="0" smtClean="0">
+                        <a:latin typeface="Cambria Math" panose="02040503050406030204" pitchFamily="18" charset="0"/>
+                        <a:ea typeface="Cambria Math" panose="02040503050406030204" pitchFamily="18" charset="0"/>
+                      </a:rPr>
+                      <m:t>𝛼</m:t>
+                    </m:r>
+                    <m:r>
+                      <a:rPr lang="en-GB" sz="1200" b="0" i="1" noProof="0" smtClean="0">
+                        <a:latin typeface="Cambria Math" panose="02040503050406030204" pitchFamily="18" charset="0"/>
+                        <a:ea typeface="Cambria Math" panose="02040503050406030204" pitchFamily="18" charset="0"/>
+                      </a:rPr>
+                      <m:t>=1−</m:t>
+                    </m:r>
+                  </m:oMath>
+                </a14:m>
+                <a:r>
+                  <a:rPr lang="en-GB" sz="1200" noProof="0" dirty="0">
+                    <a:latin typeface="Calibri" panose="020F0502020204030204" pitchFamily="34" charset="0"/>
+                    <a:ea typeface="Cambria Math" panose="02040503050406030204" pitchFamily="18" charset="0"/>
+                    <a:cs typeface="Calibri" panose="020F0502020204030204" pitchFamily="34" charset="0"/>
+                  </a:rPr>
+                  <a:t> </a:t>
+                </a:r>
+                <a:r>
+                  <a:rPr lang="en-GB" sz="1200" noProof="0" dirty="0" err="1">
+                    <a:latin typeface="Courier New" panose="02070309020205020404" pitchFamily="49" charset="0"/>
+                    <a:ea typeface="CMU Bright Roman" panose="02000603000000000000" pitchFamily="2" charset="0"/>
+                    <a:cs typeface="Courier New" panose="02070309020205020404" pitchFamily="49" charset="0"/>
+                  </a:rPr>
+                  <a:t>conf.level</a:t>
+                </a:r>
+                <a:r>
+                  <a:rPr lang="en-GB" sz="800" noProof="0" dirty="0">
+                    <a:latin typeface="CMU Bright Roman" panose="02000603000000000000" pitchFamily="2" charset="0"/>
+                    <a:ea typeface="CMU Bright Roman" panose="02000603000000000000" pitchFamily="2" charset="0"/>
+                    <a:cs typeface="CMU Bright Roman" panose="02000603000000000000" pitchFamily="2" charset="0"/>
+                  </a:rPr>
+                  <a:t> </a:t>
+                </a:r>
+              </a:p>
+              <a:p>
+                <a14:m>
+                  <m:oMath xmlns:m="http://schemas.openxmlformats.org/officeDocument/2006/math">
+                    <m:sSub>
+                      <m:sSubPr>
+                        <m:ctrlPr>
+                          <a:rPr lang="en-GB" sz="1200" i="1" noProof="0" smtClean="0">
+                            <a:latin typeface="Cambria Math" panose="02040503050406030204" pitchFamily="18" charset="0"/>
+                            <a:ea typeface="Cambria Math" panose="02040503050406030204" pitchFamily="18" charset="0"/>
+                          </a:rPr>
+                        </m:ctrlPr>
+                      </m:sSubPr>
+                      <m:e>
+                        <m:r>
+                          <a:rPr lang="en-GB" sz="1200" i="1" noProof="0" smtClean="0">
+                            <a:latin typeface="Cambria Math" panose="02040503050406030204" pitchFamily="18" charset="0"/>
+                            <a:ea typeface="Cambria Math" panose="02040503050406030204" pitchFamily="18" charset="0"/>
+                          </a:rPr>
+                          <m:t>𝑝</m:t>
+                        </m:r>
+                      </m:e>
+                      <m:sub>
+                        <m:r>
+                          <a:rPr lang="en-GB" sz="1200" i="1" noProof="0" smtClean="0">
+                            <a:latin typeface="Cambria Math" panose="02040503050406030204" pitchFamily="18" charset="0"/>
+                            <a:ea typeface="Cambria Math" panose="02040503050406030204" pitchFamily="18" charset="0"/>
+                          </a:rPr>
+                          <m:t>𝑖</m:t>
+                        </m:r>
+                      </m:sub>
+                    </m:sSub>
+                    <m:r>
+                      <a:rPr lang="en-US" sz="1200" b="0" i="0" noProof="0" smtClean="0">
+                        <a:latin typeface="Cambria Math" panose="02040503050406030204" pitchFamily="18" charset="0"/>
+                        <a:ea typeface="Cambria Math" panose="02040503050406030204" pitchFamily="18" charset="0"/>
+                      </a:rPr>
+                      <m:t>=</m:t>
+                    </m:r>
+                  </m:oMath>
+                </a14:m>
+                <a:r>
+                  <a:rPr lang="en-GB" sz="1200" noProof="0" dirty="0">
+                    <a:ea typeface="Cambria Math" panose="02040503050406030204" pitchFamily="18" charset="0"/>
+                  </a:rPr>
+                  <a:t> </a:t>
+                </a:r>
+                <a14:m>
+                  <m:oMath xmlns:m="http://schemas.openxmlformats.org/officeDocument/2006/math">
+                    <m:r>
+                      <a:rPr lang="en-GB" sz="1200" i="1" noProof="0" dirty="0" smtClean="0">
+                        <a:latin typeface="Cambria Math" panose="02040503050406030204" pitchFamily="18" charset="0"/>
+                        <a:ea typeface="Cambria Math" panose="02040503050406030204" pitchFamily="18" charset="0"/>
+                      </a:rPr>
+                      <m:t>𝑝</m:t>
+                    </m:r>
+                  </m:oMath>
+                </a14:m>
+                <a:r>
+                  <a:rPr lang="en-GB" sz="1200" noProof="0" dirty="0">
+                    <a:ea typeface="Cambria Math" panose="02040503050406030204" pitchFamily="18" charset="0"/>
+                  </a:rPr>
+                  <a:t>-value of level </a:t>
+                </a:r>
+                <a14:m>
+                  <m:oMath xmlns:m="http://schemas.openxmlformats.org/officeDocument/2006/math">
+                    <m:r>
+                      <a:rPr lang="en-GB" sz="1200" i="1" noProof="0" smtClean="0">
+                        <a:latin typeface="Cambria Math" panose="02040503050406030204" pitchFamily="18" charset="0"/>
+                        <a:ea typeface="Cambria Math" panose="02040503050406030204" pitchFamily="18" charset="0"/>
+                      </a:rPr>
+                      <m:t>𝑖</m:t>
+                    </m:r>
+                  </m:oMath>
+                </a14:m>
+                <a:endParaRPr lang="en-GB" sz="1200" noProof="0" dirty="0">
+                  <a:latin typeface="CMU Bright Roman" panose="02000603000000000000" pitchFamily="2" charset="0"/>
+                  <a:ea typeface="CMU Bright Roman" panose="02000603000000000000" pitchFamily="2" charset="0"/>
+                  <a:cs typeface="CMU Bright Roman" panose="02000603000000000000" pitchFamily="2" charset="0"/>
+                </a:endParaRPr>
+              </a:p>
+            </p:txBody>
+          </p:sp>
+        </mc:Choice>
+        <mc:Fallback>
+          <p:sp>
+            <p:nvSpPr>
+              <p:cNvPr id="11" name="Textfeld 10">
+                <a:extLst>
+                  <a:ext uri="{FF2B5EF4-FFF2-40B4-BE49-F238E27FC236}">
+                    <a16:creationId xmlns:a16="http://schemas.microsoft.com/office/drawing/2014/main" id="{E4BD2EA5-D25B-8C15-2733-8E2A2D1D9D5C}"/>
+                  </a:ext>
+                </a:extLst>
+              </p:cNvPr>
+              <p:cNvSpPr txBox="1">
+                <a:spLocks noRot="1" noChangeAspect="1" noMove="1" noResize="1" noEditPoints="1" noAdjustHandles="1" noChangeArrowheads="1" noChangeShapeType="1" noTextEdit="1"/>
+              </p:cNvSpPr>
+              <p:nvPr/>
+            </p:nvSpPr>
+            <p:spPr>
+              <a:xfrm>
+                <a:off x="10002785" y="5037737"/>
+                <a:ext cx="2082384" cy="461665"/>
+              </a:xfrm>
+              <a:prstGeom prst="rect">
+                <a:avLst/>
+              </a:prstGeom>
+              <a:blipFill>
+                <a:blip r:embed="rId4"/>
+                <a:stretch>
+                  <a:fillRect b="-7895"/>
+                </a:stretch>
+              </a:blipFill>
+              <a:ln w="6350">
+                <a:solidFill>
+                  <a:schemeClr val="bg2">
+                    <a:lumMod val="75000"/>
+                  </a:schemeClr>
+                </a:solidFill>
+              </a:ln>
+            </p:spPr>
+            <p:txBody>
+              <a:bodyPr/>
+              <a:lstStyle/>
+              <a:p>
+                <a:r>
+                  <a:rPr lang="de-DE">
+                    <a:noFill/>
+                  </a:rPr>
+                  <a:t> </a:t>
+                </a:r>
+              </a:p>
+            </p:txBody>
+          </p:sp>
+        </mc:Fallback>
+      </mc:AlternateContent>
+      <p:sp>
+        <p:nvSpPr>
+          <p:cNvPr id="149" name="Textfeld 148">
+            <a:extLst>
+              <a:ext uri="{FF2B5EF4-FFF2-40B4-BE49-F238E27FC236}">
+                <a16:creationId xmlns:a16="http://schemas.microsoft.com/office/drawing/2014/main" id="{915687A9-8923-6415-1631-86AF5E4BDCD0}"/>
+              </a:ext>
+            </a:extLst>
+          </p:cNvPr>
+          <p:cNvSpPr txBox="1"/>
+          <p:nvPr/>
+        </p:nvSpPr>
+        <p:spPr>
+          <a:xfrm>
+            <a:off x="10466742" y="3578911"/>
+            <a:ext cx="1618427" cy="276999"/>
+          </a:xfrm>
+          <a:prstGeom prst="rect">
+            <a:avLst/>
+          </a:prstGeom>
+          <a:noFill/>
+          <a:ln w="12700">
+            <a:noFill/>
+          </a:ln>
+        </p:spPr>
+        <p:txBody>
+          <a:bodyPr wrap="square">
+            <a:spAutoFit/>
+          </a:bodyPr>
+          <a:lstStyle>
+            <a:defPPr>
+              <a:defRPr lang="de-DE"/>
+            </a:defPPr>
+            <a:lvl1pPr algn="ctr">
+              <a:defRPr sz="1200"/>
+            </a:lvl1pPr>
+          </a:lstStyle>
+          <a:p>
+            <a:r>
+              <a:rPr lang="en-GB" noProof="0" dirty="0">
+                <a:latin typeface="Calibri" panose="020F0502020204030204" pitchFamily="34" charset="0"/>
+                <a:ea typeface="Cambria Math" panose="02040503050406030204" pitchFamily="18" charset="0"/>
+                <a:cs typeface="Calibri" panose="020F0502020204030204" pitchFamily="34" charset="0"/>
+              </a:rPr>
+              <a:t>Final test selected </a:t>
+            </a:r>
+          </a:p>
+        </p:txBody>
+      </p:sp>
+      <p:cxnSp>
+        <p:nvCxnSpPr>
+          <p:cNvPr id="185" name="Gewinkelte Verbindung 184">
+            <a:extLst>
+              <a:ext uri="{FF2B5EF4-FFF2-40B4-BE49-F238E27FC236}">
+                <a16:creationId xmlns:a16="http://schemas.microsoft.com/office/drawing/2014/main" id="{B2C34A30-B9E6-7C75-1648-FD1E63851B65}"/>
+              </a:ext>
+            </a:extLst>
+          </p:cNvPr>
+          <p:cNvCxnSpPr>
+            <a:cxnSpLocks/>
+            <a:stCxn id="7" idx="3"/>
+          </p:cNvCxnSpPr>
+          <p:nvPr/>
+        </p:nvCxnSpPr>
+        <p:spPr>
+          <a:xfrm>
+            <a:off x="9681411" y="499148"/>
+            <a:ext cx="118826" cy="334194"/>
+          </a:xfrm>
+          <a:prstGeom prst="bentConnector2">
+            <a:avLst/>
+          </a:prstGeom>
+          <a:ln>
+            <a:noFill/>
+            <a:tailEnd type="triangle"/>
+          </a:ln>
+        </p:spPr>
+        <p:style>
+          <a:lnRef idx="1">
+            <a:schemeClr val="accent1"/>
+          </a:lnRef>
+          <a:fillRef idx="0">
+            <a:schemeClr val="accent1"/>
+          </a:fillRef>
+          <a:effectRef idx="0">
+            <a:schemeClr val="accent1"/>
+          </a:effectRef>
+          <a:fontRef idx="minor">
+            <a:schemeClr val="tx1"/>
+          </a:fontRef>
+        </p:style>
+      </p:cxnSp>
+      <p:grpSp>
+        <p:nvGrpSpPr>
+          <p:cNvPr id="491" name="Gruppieren 490">
+            <a:extLst>
+              <a:ext uri="{FF2B5EF4-FFF2-40B4-BE49-F238E27FC236}">
+                <a16:creationId xmlns:a16="http://schemas.microsoft.com/office/drawing/2014/main" id="{246CA81A-7D14-570C-B769-94A229A7B8AE}"/>
+              </a:ext>
+            </a:extLst>
+          </p:cNvPr>
+          <p:cNvGrpSpPr/>
+          <p:nvPr/>
+        </p:nvGrpSpPr>
+        <p:grpSpPr>
+          <a:xfrm>
+            <a:off x="2906791" y="729980"/>
+            <a:ext cx="5142560" cy="528220"/>
+            <a:chOff x="1278983" y="1339017"/>
+            <a:chExt cx="2729665" cy="310727"/>
+          </a:xfrm>
+        </p:grpSpPr>
+        <p:cxnSp>
+          <p:nvCxnSpPr>
+            <p:cNvPr id="492" name="Gerade Verbindung mit Pfeil 491">
+              <a:extLst>
+                <a:ext uri="{FF2B5EF4-FFF2-40B4-BE49-F238E27FC236}">
+                  <a16:creationId xmlns:a16="http://schemas.microsoft.com/office/drawing/2014/main" id="{9C94E7FB-9A4D-10F1-FE12-D05A1A8305DD}"/>
+                </a:ext>
+              </a:extLst>
+            </p:cNvPr>
+            <p:cNvCxnSpPr>
+              <a:cxnSpLocks/>
+              <a:stCxn id="7" idx="2"/>
+            </p:cNvCxnSpPr>
+            <p:nvPr/>
+          </p:nvCxnSpPr>
+          <p:spPr>
+            <a:xfrm flipH="1">
+              <a:off x="1278983" y="1339017"/>
+              <a:ext cx="1807783" cy="262316"/>
+            </a:xfrm>
+            <a:prstGeom prst="straightConnector1">
+              <a:avLst/>
+            </a:prstGeom>
+            <a:ln>
+              <a:noFill/>
+              <a:tailEnd type="triangle"/>
+            </a:ln>
+          </p:spPr>
+          <p:style>
+            <a:lnRef idx="1">
+              <a:schemeClr val="accent1"/>
+            </a:lnRef>
+            <a:fillRef idx="0">
+              <a:schemeClr val="accent1"/>
+            </a:fillRef>
+            <a:effectRef idx="0">
+              <a:schemeClr val="accent1"/>
+            </a:effectRef>
+            <a:fontRef idx="minor">
+              <a:schemeClr val="tx1"/>
+            </a:fontRef>
+          </p:style>
+        </p:cxnSp>
+        <p:cxnSp>
+          <p:nvCxnSpPr>
+            <p:cNvPr id="493" name="Gerade Verbindung mit Pfeil 492">
+              <a:extLst>
+                <a:ext uri="{FF2B5EF4-FFF2-40B4-BE49-F238E27FC236}">
+                  <a16:creationId xmlns:a16="http://schemas.microsoft.com/office/drawing/2014/main" id="{C0B4E62F-50C0-DD7B-0D15-C34A78E70B3C}"/>
+                </a:ext>
+              </a:extLst>
+            </p:cNvPr>
+            <p:cNvCxnSpPr>
+              <a:cxnSpLocks/>
+              <a:stCxn id="7" idx="2"/>
+            </p:cNvCxnSpPr>
+            <p:nvPr/>
+          </p:nvCxnSpPr>
+          <p:spPr>
+            <a:xfrm>
+              <a:off x="3086766" y="1339017"/>
+              <a:ext cx="921882" cy="310727"/>
+            </a:xfrm>
+            <a:prstGeom prst="straightConnector1">
+              <a:avLst/>
+            </a:prstGeom>
+            <a:ln>
+              <a:noFill/>
+              <a:tailEnd type="triangle"/>
+            </a:ln>
+          </p:spPr>
+          <p:style>
+            <a:lnRef idx="1">
+              <a:schemeClr val="accent1"/>
+            </a:lnRef>
+            <a:fillRef idx="0">
+              <a:schemeClr val="accent1"/>
+            </a:fillRef>
+            <a:effectRef idx="0">
+              <a:schemeClr val="accent1"/>
+            </a:effectRef>
+            <a:fontRef idx="minor">
+              <a:schemeClr val="tx1"/>
+            </a:fontRef>
+          </p:style>
+        </p:cxnSp>
+      </p:grpSp>
+      <p:sp>
+        <p:nvSpPr>
+          <p:cNvPr id="79" name="Rechteck 78">
+            <a:extLst>
+              <a:ext uri="{FF2B5EF4-FFF2-40B4-BE49-F238E27FC236}">
+                <a16:creationId xmlns:a16="http://schemas.microsoft.com/office/drawing/2014/main" id="{2C8EFB28-B064-4487-A0A6-F2D2A629A62D}"/>
+              </a:ext>
+            </a:extLst>
+          </p:cNvPr>
+          <p:cNvSpPr/>
+          <p:nvPr/>
+        </p:nvSpPr>
+        <p:spPr>
+          <a:xfrm>
+            <a:off x="998506" y="4788842"/>
+            <a:ext cx="6342452" cy="734888"/>
+          </a:xfrm>
+          <a:prstGeom prst="rect">
+            <a:avLst/>
+          </a:prstGeom>
+          <a:noFill/>
+          <a:ln>
+            <a:noFill/>
+          </a:ln>
+        </p:spPr>
+        <p:style>
+          <a:lnRef idx="2">
+            <a:schemeClr val="accent1">
+              <a:shade val="15000"/>
+            </a:schemeClr>
+          </a:lnRef>
+          <a:fillRef idx="1">
+            <a:schemeClr val="accent1"/>
+          </a:fillRef>
+          <a:effectRef idx="0">
+            <a:schemeClr val="accent1"/>
+          </a:effectRef>
+          <a:fontRef idx="minor">
+            <a:schemeClr val="lt1"/>
+          </a:fontRef>
+        </p:style>
+        <p:txBody>
+          <a:bodyPr rtlCol="0" anchor="ctr"/>
+          <a:lstStyle/>
+          <a:p>
+            <a:pPr algn="ctr"/>
+            <a:endParaRPr lang="de-DE"/>
+          </a:p>
+        </p:txBody>
+      </p:sp>
+      <mc:AlternateContent xmlns:mc="http://schemas.openxmlformats.org/markup-compatibility/2006">
+        <mc:Choice xmlns:a14="http://schemas.microsoft.com/office/drawing/2010/main" Requires="a14">
+          <p:sp>
+            <p:nvSpPr>
+              <p:cNvPr id="18" name="Textfeld 17">
+                <a:extLst>
+                  <a:ext uri="{FF2B5EF4-FFF2-40B4-BE49-F238E27FC236}">
+                    <a16:creationId xmlns:a16="http://schemas.microsoft.com/office/drawing/2014/main" id="{54420FD2-A34B-7450-5D0B-7E73A4B341BB}"/>
+                  </a:ext>
+                </a:extLst>
+              </p:cNvPr>
+              <p:cNvSpPr txBox="1"/>
+              <p:nvPr/>
+            </p:nvSpPr>
+            <p:spPr>
+              <a:xfrm>
+                <a:off x="3162673" y="1120600"/>
+                <a:ext cx="1447007" cy="276999"/>
+              </a:xfrm>
+              <a:prstGeom prst="rect">
+                <a:avLst/>
+              </a:prstGeom>
+              <a:noFill/>
+              <a:ln w="12700">
+                <a:noFill/>
+              </a:ln>
+            </p:spPr>
+            <p:txBody>
+              <a:bodyPr wrap="square">
+                <a:spAutoFit/>
+              </a:bodyPr>
+              <a:lstStyle/>
+              <a:p>
+                <a:pPr algn="ctr"/>
+                <a14:m>
+                  <m:oMathPara xmlns:m="http://schemas.openxmlformats.org/officeDocument/2006/math">
+                    <m:oMathParaPr>
+                      <m:jc m:val="centerGroup"/>
+                    </m:oMathParaPr>
+                    <m:oMath xmlns:m="http://schemas.openxmlformats.org/officeDocument/2006/math">
+                      <m:r>
+                        <a:rPr lang="en-US" sz="1200" b="0" i="1" smtClean="0">
+                          <a:latin typeface="Cambria Math" panose="02040503050406030204" pitchFamily="18" charset="0"/>
+                          <a:ea typeface="Cambria Math" panose="02040503050406030204" pitchFamily="18" charset="0"/>
+                        </a:rPr>
+                        <m:t>𝑁</m:t>
+                      </m:r>
+                      <m:r>
+                        <a:rPr lang="en-US" sz="1200" b="0" i="1" smtClean="0">
+                          <a:latin typeface="Cambria Math" panose="02040503050406030204" pitchFamily="18" charset="0"/>
+                          <a:ea typeface="Cambria Math" panose="02040503050406030204" pitchFamily="18" charset="0"/>
+                        </a:rPr>
+                        <m:t>=2</m:t>
+                      </m:r>
+                    </m:oMath>
+                  </m:oMathPara>
+                </a14:m>
+                <a:endParaRPr lang="en-GB" sz="1200" noProof="0" dirty="0">
+                  <a:latin typeface="Calibri" panose="020F0502020204030204" pitchFamily="34" charset="0"/>
+                  <a:ea typeface="Cambria Math" panose="02040503050406030204" pitchFamily="18" charset="0"/>
+                  <a:cs typeface="Calibri" panose="020F0502020204030204" pitchFamily="34" charset="0"/>
+                </a:endParaRPr>
+              </a:p>
+            </p:txBody>
+          </p:sp>
+        </mc:Choice>
+        <mc:Fallback>
+          <p:sp>
+            <p:nvSpPr>
+              <p:cNvPr id="18" name="Textfeld 17">
+                <a:extLst>
+                  <a:ext uri="{FF2B5EF4-FFF2-40B4-BE49-F238E27FC236}">
+                    <a16:creationId xmlns:a16="http://schemas.microsoft.com/office/drawing/2014/main" id="{54420FD2-A34B-7450-5D0B-7E73A4B341BB}"/>
+                  </a:ext>
+                </a:extLst>
+              </p:cNvPr>
+              <p:cNvSpPr txBox="1">
+                <a:spLocks noRot="1" noChangeAspect="1" noMove="1" noResize="1" noEditPoints="1" noAdjustHandles="1" noChangeArrowheads="1" noChangeShapeType="1" noTextEdit="1"/>
+              </p:cNvSpPr>
+              <p:nvPr/>
+            </p:nvSpPr>
+            <p:spPr>
+              <a:xfrm>
+                <a:off x="3162673" y="1120600"/>
+                <a:ext cx="1447007" cy="276999"/>
+              </a:xfrm>
+              <a:prstGeom prst="rect">
+                <a:avLst/>
+              </a:prstGeom>
+              <a:blipFill>
+                <a:blip r:embed="rId5"/>
+                <a:stretch>
+                  <a:fillRect/>
+                </a:stretch>
+              </a:blipFill>
+              <a:ln w="12700">
+                <a:noFill/>
+              </a:ln>
+            </p:spPr>
+            <p:txBody>
+              <a:bodyPr/>
+              <a:lstStyle/>
+              <a:p>
+                <a:r>
+                  <a:rPr lang="de-DE">
+                    <a:noFill/>
+                  </a:rPr>
+                  <a:t> </a:t>
+                </a:r>
+              </a:p>
+            </p:txBody>
+          </p:sp>
+        </mc:Fallback>
+      </mc:AlternateContent>
+      <mc:AlternateContent xmlns:mc="http://schemas.openxmlformats.org/markup-compatibility/2006">
+        <mc:Choice xmlns:a14="http://schemas.microsoft.com/office/drawing/2010/main" Requires="a14">
+          <p:sp>
+            <p:nvSpPr>
+              <p:cNvPr id="19" name="Textfeld 18">
+                <a:extLst>
+                  <a:ext uri="{FF2B5EF4-FFF2-40B4-BE49-F238E27FC236}">
+                    <a16:creationId xmlns:a16="http://schemas.microsoft.com/office/drawing/2014/main" id="{8766EC5D-1E4A-29F4-A01B-0FBC7CE786AE}"/>
+                  </a:ext>
+                </a:extLst>
+              </p:cNvPr>
+              <p:cNvSpPr txBox="1"/>
+              <p:nvPr/>
+            </p:nvSpPr>
+            <p:spPr>
+              <a:xfrm>
+                <a:off x="7119266" y="1208210"/>
+                <a:ext cx="2322867" cy="276999"/>
+              </a:xfrm>
+              <a:prstGeom prst="rect">
+                <a:avLst/>
+              </a:prstGeom>
+              <a:noFill/>
+              <a:ln w="12700">
+                <a:noFill/>
+              </a:ln>
+            </p:spPr>
+            <p:txBody>
+              <a:bodyPr wrap="square">
+                <a:spAutoFit/>
+              </a:bodyPr>
+              <a:lstStyle/>
+              <a:p>
+                <a:pPr algn="ctr"/>
+                <a14:m>
+                  <m:oMathPara xmlns:m="http://schemas.openxmlformats.org/officeDocument/2006/math">
+                    <m:oMathParaPr>
+                      <m:jc m:val="centerGroup"/>
+                    </m:oMathParaPr>
+                    <m:oMath xmlns:m="http://schemas.openxmlformats.org/officeDocument/2006/math">
+                      <m:r>
+                        <a:rPr lang="en-US" sz="1200" b="0" i="1" smtClean="0">
+                          <a:latin typeface="Cambria Math" panose="02040503050406030204" pitchFamily="18" charset="0"/>
+                          <a:ea typeface="Cambria Math" panose="02040503050406030204" pitchFamily="18" charset="0"/>
+                        </a:rPr>
+                        <m:t>𝑁</m:t>
+                      </m:r>
+                      <m:r>
+                        <a:rPr lang="en-US" sz="1200" b="0" i="1" smtClean="0">
+                          <a:latin typeface="Cambria Math" panose="02040503050406030204" pitchFamily="18" charset="0"/>
+                          <a:ea typeface="Cambria Math" panose="02040503050406030204" pitchFamily="18" charset="0"/>
+                        </a:rPr>
+                        <m:t>&gt;2</m:t>
+                      </m:r>
+                    </m:oMath>
+                  </m:oMathPara>
+                </a14:m>
+                <a:endParaRPr lang="en-GB" sz="1200" noProof="0" dirty="0">
+                  <a:latin typeface="Calibri" panose="020F0502020204030204" pitchFamily="34" charset="0"/>
+                  <a:ea typeface="Cambria Math" panose="02040503050406030204" pitchFamily="18" charset="0"/>
+                  <a:cs typeface="Calibri" panose="020F0502020204030204" pitchFamily="34" charset="0"/>
+                </a:endParaRPr>
+              </a:p>
+            </p:txBody>
+          </p:sp>
+        </mc:Choice>
+        <mc:Fallback>
+          <p:sp>
+            <p:nvSpPr>
+              <p:cNvPr id="19" name="Textfeld 18">
+                <a:extLst>
+                  <a:ext uri="{FF2B5EF4-FFF2-40B4-BE49-F238E27FC236}">
+                    <a16:creationId xmlns:a16="http://schemas.microsoft.com/office/drawing/2014/main" id="{8766EC5D-1E4A-29F4-A01B-0FBC7CE786AE}"/>
+                  </a:ext>
+                </a:extLst>
+              </p:cNvPr>
+              <p:cNvSpPr txBox="1">
+                <a:spLocks noRot="1" noChangeAspect="1" noMove="1" noResize="1" noEditPoints="1" noAdjustHandles="1" noChangeArrowheads="1" noChangeShapeType="1" noTextEdit="1"/>
+              </p:cNvSpPr>
+              <p:nvPr/>
+            </p:nvSpPr>
+            <p:spPr>
+              <a:xfrm>
+                <a:off x="7119266" y="1208210"/>
+                <a:ext cx="2322867" cy="276999"/>
+              </a:xfrm>
+              <a:prstGeom prst="rect">
+                <a:avLst/>
+              </a:prstGeom>
+              <a:blipFill>
+                <a:blip r:embed="rId6"/>
+                <a:stretch>
+                  <a:fillRect/>
+                </a:stretch>
+              </a:blipFill>
+              <a:ln w="12700">
+                <a:noFill/>
+              </a:ln>
+            </p:spPr>
+            <p:txBody>
+              <a:bodyPr/>
+              <a:lstStyle/>
+              <a:p>
+                <a:r>
+                  <a:rPr lang="de-DE">
+                    <a:noFill/>
+                  </a:rPr>
+                  <a:t> </a:t>
+                </a:r>
+              </a:p>
+            </p:txBody>
+          </p:sp>
+        </mc:Fallback>
+      </mc:AlternateContent>
+      <p:cxnSp>
+        <p:nvCxnSpPr>
+          <p:cNvPr id="32" name="Gerade Verbindung mit Pfeil 31">
+            <a:extLst>
+              <a:ext uri="{FF2B5EF4-FFF2-40B4-BE49-F238E27FC236}">
+                <a16:creationId xmlns:a16="http://schemas.microsoft.com/office/drawing/2014/main" id="{ADF60565-8C24-2554-76B7-46720FC9CFE9}"/>
+              </a:ext>
+            </a:extLst>
+          </p:cNvPr>
+          <p:cNvCxnSpPr>
+            <a:cxnSpLocks/>
+          </p:cNvCxnSpPr>
+          <p:nvPr/>
+        </p:nvCxnSpPr>
+        <p:spPr>
+          <a:xfrm>
+            <a:off x="8408686" y="2075169"/>
+            <a:ext cx="0" cy="193052"/>
+          </a:xfrm>
+          <a:prstGeom prst="straightConnector1">
+            <a:avLst/>
+          </a:prstGeom>
+          <a:ln>
+            <a:noFill/>
+            <a:tailEnd type="triangle"/>
+          </a:ln>
+        </p:spPr>
+        <p:style>
+          <a:lnRef idx="1">
+            <a:schemeClr val="accent1"/>
+          </a:lnRef>
+          <a:fillRef idx="0">
+            <a:schemeClr val="accent1"/>
+          </a:fillRef>
+          <a:effectRef idx="0">
+            <a:schemeClr val="accent1"/>
+          </a:effectRef>
+          <a:fontRef idx="minor">
+            <a:schemeClr val="tx1"/>
+          </a:fontRef>
+        </p:style>
+      </p:cxnSp>
+      <p:grpSp>
+        <p:nvGrpSpPr>
+          <p:cNvPr id="46" name="Gruppieren 45">
+            <a:extLst>
+              <a:ext uri="{FF2B5EF4-FFF2-40B4-BE49-F238E27FC236}">
+                <a16:creationId xmlns:a16="http://schemas.microsoft.com/office/drawing/2014/main" id="{5A7A9254-0F9B-463A-49F8-753D826A9504}"/>
+              </a:ext>
+            </a:extLst>
+          </p:cNvPr>
+          <p:cNvGrpSpPr/>
+          <p:nvPr/>
+        </p:nvGrpSpPr>
+        <p:grpSpPr>
+          <a:xfrm>
+            <a:off x="4210348" y="742114"/>
+            <a:ext cx="3771304" cy="366352"/>
+            <a:chOff x="2719572" y="1536945"/>
+            <a:chExt cx="1289076" cy="305400"/>
+          </a:xfrm>
+        </p:grpSpPr>
+        <p:cxnSp>
+          <p:nvCxnSpPr>
+            <p:cNvPr id="47" name="Gerade Verbindung mit Pfeil 46">
+              <a:extLst>
+                <a:ext uri="{FF2B5EF4-FFF2-40B4-BE49-F238E27FC236}">
+                  <a16:creationId xmlns:a16="http://schemas.microsoft.com/office/drawing/2014/main" id="{2821E20A-8235-89AF-7E93-42DB15FCB0FB}"/>
+                </a:ext>
+              </a:extLst>
+            </p:cNvPr>
+            <p:cNvCxnSpPr>
+              <a:cxnSpLocks/>
+            </p:cNvCxnSpPr>
+            <p:nvPr/>
+          </p:nvCxnSpPr>
+          <p:spPr>
+            <a:xfrm flipH="1">
+              <a:off x="2719572" y="1536945"/>
+              <a:ext cx="639486" cy="305400"/>
+            </a:xfrm>
+            <a:prstGeom prst="straightConnector1">
+              <a:avLst/>
+            </a:prstGeom>
+            <a:ln>
+              <a:tailEnd type="triangle"/>
+            </a:ln>
+          </p:spPr>
+          <p:style>
+            <a:lnRef idx="1">
+              <a:schemeClr val="accent1"/>
+            </a:lnRef>
+            <a:fillRef idx="0">
+              <a:schemeClr val="accent1"/>
+            </a:fillRef>
+            <a:effectRef idx="0">
+              <a:schemeClr val="accent1"/>
+            </a:effectRef>
+            <a:fontRef idx="minor">
+              <a:schemeClr val="tx1"/>
+            </a:fontRef>
+          </p:style>
+        </p:cxnSp>
+        <p:cxnSp>
+          <p:nvCxnSpPr>
+            <p:cNvPr id="48" name="Gerade Verbindung mit Pfeil 47">
+              <a:extLst>
+                <a:ext uri="{FF2B5EF4-FFF2-40B4-BE49-F238E27FC236}">
+                  <a16:creationId xmlns:a16="http://schemas.microsoft.com/office/drawing/2014/main" id="{0495827B-B673-1EFD-BF68-C04E6DCD6442}"/>
+                </a:ext>
+              </a:extLst>
+            </p:cNvPr>
+            <p:cNvCxnSpPr>
+              <a:cxnSpLocks/>
+            </p:cNvCxnSpPr>
+            <p:nvPr/>
+          </p:nvCxnSpPr>
+          <p:spPr>
+            <a:xfrm>
+              <a:off x="3359058" y="1536945"/>
+              <a:ext cx="649590" cy="305400"/>
+            </a:xfrm>
+            <a:prstGeom prst="straightConnector1">
+              <a:avLst/>
+            </a:prstGeom>
+            <a:ln>
+              <a:tailEnd type="triangle"/>
+            </a:ln>
+          </p:spPr>
+          <p:style>
+            <a:lnRef idx="1">
+              <a:schemeClr val="accent1"/>
+            </a:lnRef>
+            <a:fillRef idx="0">
+              <a:schemeClr val="accent1"/>
+            </a:fillRef>
+            <a:effectRef idx="0">
+              <a:schemeClr val="accent1"/>
+            </a:effectRef>
+            <a:fontRef idx="minor">
+              <a:schemeClr val="tx1"/>
+            </a:fontRef>
+          </p:style>
+        </p:cxnSp>
+      </p:grpSp>
+      <p:cxnSp>
+        <p:nvCxnSpPr>
+          <p:cNvPr id="56" name="Gerade Verbindung mit Pfeil 55">
+            <a:extLst>
+              <a:ext uri="{FF2B5EF4-FFF2-40B4-BE49-F238E27FC236}">
+                <a16:creationId xmlns:a16="http://schemas.microsoft.com/office/drawing/2014/main" id="{704D0D1F-586E-9BFC-D9E7-31432CA12412}"/>
+              </a:ext>
+            </a:extLst>
+          </p:cNvPr>
+          <p:cNvCxnSpPr>
+            <a:cxnSpLocks/>
+          </p:cNvCxnSpPr>
+          <p:nvPr/>
+        </p:nvCxnSpPr>
+        <p:spPr>
+          <a:xfrm>
+            <a:off x="8280699" y="1784678"/>
+            <a:ext cx="0" cy="276999"/>
+          </a:xfrm>
+          <a:prstGeom prst="straightConnector1">
+            <a:avLst/>
+          </a:prstGeom>
+          <a:ln>
+            <a:solidFill>
+              <a:schemeClr val="accent1"/>
+            </a:solidFill>
+            <a:tailEnd type="triangle"/>
+          </a:ln>
+        </p:spPr>
+        <p:style>
+          <a:lnRef idx="1">
+            <a:schemeClr val="accent1"/>
+          </a:lnRef>
+          <a:fillRef idx="0">
+            <a:schemeClr val="accent1"/>
+          </a:fillRef>
+          <a:effectRef idx="0">
+            <a:schemeClr val="accent1"/>
+          </a:effectRef>
+          <a:fontRef idx="minor">
+            <a:schemeClr val="tx1"/>
+          </a:fontRef>
+        </p:style>
+      </p:cxnSp>
+    </p:spTree>
+    <p:extLst>
+      <p:ext uri="{BB962C8B-B14F-4D97-AF65-F5344CB8AC3E}">
+        <p14:creationId xmlns:p14="http://schemas.microsoft.com/office/powerpoint/2010/main" val="1919346709"/>
       </p:ext>
     </p:extLst>
   </p:cSld>
